--- a/koreatech-db/weeks/10주차_뷰·인덱스·권한DCL.pptx
+++ b/koreatech-db/weeks/10주차_뷰·인덱스·권한DCL.pptx
@@ -4178,9 +4178,9 @@
                 <a:solidFill>
                   <a:srgbClr val="7A869C"/>
                 </a:solidFill>
-                <a:latin typeface="나눔고딕코딩"/>
-                <a:ea typeface="나눔고딕코딩"/>
-                <a:cs typeface="나눔고딕코딩"/>
+                <a:latin typeface="D2Coding"/>
+                <a:ea typeface="D2Coding"/>
+                <a:cs typeface="D2Coding"/>
               </a:rPr>
               <a:t>1</a:t>
             </a:r>
@@ -4196,9 +4196,9 @@
                 <a:solidFill>
                   <a:srgbClr val="7A869C"/>
                 </a:solidFill>
-                <a:latin typeface="나눔고딕코딩"/>
-                <a:ea typeface="나눔고딕코딩"/>
-                <a:cs typeface="나눔고딕코딩"/>
+                <a:latin typeface="D2Coding"/>
+                <a:ea typeface="D2Coding"/>
+                <a:cs typeface="D2Coding"/>
               </a:rPr>
               <a:t>2</a:t>
             </a:r>
@@ -4214,9 +4214,9 @@
                 <a:solidFill>
                   <a:srgbClr val="7A869C"/>
                 </a:solidFill>
-                <a:latin typeface="나눔고딕코딩"/>
-                <a:ea typeface="나눔고딕코딩"/>
-                <a:cs typeface="나눔고딕코딩"/>
+                <a:latin typeface="D2Coding"/>
+                <a:ea typeface="D2Coding"/>
+                <a:cs typeface="D2Coding"/>
               </a:rPr>
               <a:t>3</a:t>
             </a:r>
@@ -4232,9 +4232,9 @@
                 <a:solidFill>
                   <a:srgbClr val="7A869C"/>
                 </a:solidFill>
-                <a:latin typeface="나눔고딕코딩"/>
-                <a:ea typeface="나눔고딕코딩"/>
-                <a:cs typeface="나눔고딕코딩"/>
+                <a:latin typeface="D2Coding"/>
+                <a:ea typeface="D2Coding"/>
+                <a:cs typeface="D2Coding"/>
               </a:rPr>
               <a:t>4</a:t>
             </a:r>
@@ -4250,9 +4250,9 @@
                 <a:solidFill>
                   <a:srgbClr val="7A869C"/>
                 </a:solidFill>
-                <a:latin typeface="나눔고딕코딩"/>
-                <a:ea typeface="나눔고딕코딩"/>
-                <a:cs typeface="나눔고딕코딩"/>
+                <a:latin typeface="D2Coding"/>
+                <a:ea typeface="D2Coding"/>
+                <a:cs typeface="D2Coding"/>
               </a:rPr>
               <a:t>5</a:t>
             </a:r>
@@ -4268,9 +4268,9 @@
                 <a:solidFill>
                   <a:srgbClr val="7A869C"/>
                 </a:solidFill>
-                <a:latin typeface="나눔고딕코딩"/>
-                <a:ea typeface="나눔고딕코딩"/>
-                <a:cs typeface="나눔고딕코딩"/>
+                <a:latin typeface="D2Coding"/>
+                <a:ea typeface="D2Coding"/>
+                <a:cs typeface="D2Coding"/>
               </a:rPr>
               <a:t>6</a:t>
             </a:r>
@@ -4286,9 +4286,9 @@
                 <a:solidFill>
                   <a:srgbClr val="7A869C"/>
                 </a:solidFill>
-                <a:latin typeface="나눔고딕코딩"/>
-                <a:ea typeface="나눔고딕코딩"/>
-                <a:cs typeface="나눔고딕코딩"/>
+                <a:latin typeface="D2Coding"/>
+                <a:ea typeface="D2Coding"/>
+                <a:cs typeface="D2Coding"/>
               </a:rPr>
               <a:t>7</a:t>
             </a:r>
@@ -4304,9 +4304,9 @@
                 <a:solidFill>
                   <a:srgbClr val="7A869C"/>
                 </a:solidFill>
-                <a:latin typeface="나눔고딕코딩"/>
-                <a:ea typeface="나눔고딕코딩"/>
-                <a:cs typeface="나눔고딕코딩"/>
+                <a:latin typeface="D2Coding"/>
+                <a:ea typeface="D2Coding"/>
+                <a:cs typeface="D2Coding"/>
               </a:rPr>
               <a:t>8</a:t>
             </a:r>
@@ -4322,9 +4322,9 @@
                 <a:solidFill>
                   <a:srgbClr val="7A869C"/>
                 </a:solidFill>
-                <a:latin typeface="나눔고딕코딩"/>
-                <a:ea typeface="나눔고딕코딩"/>
-                <a:cs typeface="나눔고딕코딩"/>
+                <a:latin typeface="D2Coding"/>
+                <a:ea typeface="D2Coding"/>
+                <a:cs typeface="D2Coding"/>
               </a:rPr>
               <a:t>9</a:t>
             </a:r>
@@ -4340,9 +4340,9 @@
                 <a:solidFill>
                   <a:srgbClr val="7A869C"/>
                 </a:solidFill>
-                <a:latin typeface="나눔고딕코딩"/>
-                <a:ea typeface="나눔고딕코딩"/>
-                <a:cs typeface="나눔고딕코딩"/>
+                <a:latin typeface="D2Coding"/>
+                <a:ea typeface="D2Coding"/>
+                <a:cs typeface="D2Coding"/>
               </a:rPr>
               <a:t>10</a:t>
             </a:r>
@@ -4381,9 +4381,9 @@
                 <a:solidFill>
                   <a:srgbClr val="E6EAF2"/>
                 </a:solidFill>
-                <a:latin typeface="나눔고딕코딩"/>
-                <a:ea typeface="나눔고딕코딩"/>
-                <a:cs typeface="나눔고딕코딩"/>
+                <a:latin typeface="D2Coding"/>
+                <a:ea typeface="D2Coding"/>
+                <a:cs typeface="D2Coding"/>
               </a:rPr>
               <a:t>CREATE VIEW v_vip_only AS</a:t>
             </a:r>
@@ -4399,9 +4399,9 @@
                 <a:solidFill>
                   <a:srgbClr val="E6EAF2"/>
                 </a:solidFill>
-                <a:latin typeface="나눔고딕코딩"/>
-                <a:ea typeface="나눔고딕코딩"/>
-                <a:cs typeface="나눔고딕코딩"/>
+                <a:latin typeface="D2Coding"/>
+                <a:ea typeface="D2Coding"/>
+                <a:cs typeface="D2Coding"/>
               </a:rPr>
               <a:t>SELECT cust_id, name, grade, city, email, joined_date, points</a:t>
             </a:r>
@@ -4417,9 +4417,9 @@
                 <a:solidFill>
                   <a:srgbClr val="E6EAF2"/>
                 </a:solidFill>
-                <a:latin typeface="나눔고딕코딩"/>
-                <a:ea typeface="나눔고딕코딩"/>
-                <a:cs typeface="나눔고딕코딩"/>
+                <a:latin typeface="D2Coding"/>
+                <a:ea typeface="D2Coding"/>
+                <a:cs typeface="D2Coding"/>
               </a:rPr>
               <a:t>FROM   customers</a:t>
             </a:r>
@@ -4435,9 +4435,9 @@
                 <a:solidFill>
                   <a:srgbClr val="E6EAF2"/>
                 </a:solidFill>
-                <a:latin typeface="나눔고딕코딩"/>
-                <a:ea typeface="나눔고딕코딩"/>
-                <a:cs typeface="나눔고딕코딩"/>
+                <a:latin typeface="D2Coding"/>
+                <a:ea typeface="D2Coding"/>
+                <a:cs typeface="D2Coding"/>
               </a:rPr>
               <a:t>WHERE  grade = 'VIP'</a:t>
             </a:r>
@@ -4453,9 +4453,9 @@
                 <a:solidFill>
                   <a:srgbClr val="E6EAF2"/>
                 </a:solidFill>
-                <a:latin typeface="나눔고딕코딩"/>
-                <a:ea typeface="나눔고딕코딩"/>
-                <a:cs typeface="나눔고딕코딩"/>
+                <a:latin typeface="D2Coding"/>
+                <a:ea typeface="D2Coding"/>
+                <a:cs typeface="D2Coding"/>
               </a:rPr>
               <a:t>WITH CHECK OPTION;</a:t>
             </a:r>
@@ -4471,9 +4471,9 @@
                 <a:solidFill>
                   <a:srgbClr val="E6EAF2"/>
                 </a:solidFill>
-                <a:latin typeface="나눔고딕코딩"/>
-                <a:ea typeface="나눔고딕코딩"/>
-                <a:cs typeface="나눔고딕코딩"/>
+                <a:latin typeface="D2Coding"/>
+                <a:ea typeface="D2Coding"/>
+                <a:cs typeface="D2Coding"/>
               </a:rPr>
               <a:t/>
             </a:r>
@@ -4489,9 +4489,9 @@
                 <a:solidFill>
                   <a:srgbClr val="E6EAF2"/>
                 </a:solidFill>
-                <a:latin typeface="나눔고딕코딩"/>
-                <a:ea typeface="나눔고딕코딩"/>
-                <a:cs typeface="나눔고딕코딩"/>
+                <a:latin typeface="D2Coding"/>
+                <a:ea typeface="D2Coding"/>
+                <a:cs typeface="D2Coding"/>
               </a:rPr>
               <a:t>INSERT INTO v_vip_only</a:t>
             </a:r>
@@ -4507,9 +4507,9 @@
                 <a:solidFill>
                   <a:srgbClr val="E6EAF2"/>
                 </a:solidFill>
-                <a:latin typeface="나눔고딕코딩"/>
-                <a:ea typeface="나눔고딕코딩"/>
-                <a:cs typeface="나눔고딕코딩"/>
+                <a:latin typeface="D2Coding"/>
+                <a:ea typeface="D2Coding"/>
+                <a:cs typeface="D2Coding"/>
               </a:rPr>
               <a:t>VALUES ('C011','오하늘','SILVER','서울',</a:t>
             </a:r>
@@ -4525,9 +4525,9 @@
                 <a:solidFill>
                   <a:srgbClr val="E6EAF2"/>
                 </a:solidFill>
-                <a:latin typeface="나눔고딕코딩"/>
-                <a:ea typeface="나눔고딕코딩"/>
-                <a:cs typeface="나눔고딕코딩"/>
+                <a:latin typeface="D2Coding"/>
+                <a:ea typeface="D2Coding"/>
+                <a:cs typeface="D2Coding"/>
               </a:rPr>
               <a:t>        'haneul@example.com','2026-07-01',0);</a:t>
             </a:r>
@@ -4543,9 +4543,9 @@
                 <a:solidFill>
                   <a:srgbClr val="E6EAF2"/>
                 </a:solidFill>
-                <a:latin typeface="나눔고딕코딩"/>
-                <a:ea typeface="나눔고딕코딩"/>
-                <a:cs typeface="나눔고딕코딩"/>
+                <a:latin typeface="D2Coding"/>
+                <a:ea typeface="D2Coding"/>
+                <a:cs typeface="D2Coding"/>
               </a:rPr>
               <a:t>-- ERROR 1369: CHECK OPTION failed  (grade='VIP' 조건 위반)</a:t>
             </a:r>
@@ -8610,9 +8610,9 @@
                 <a:solidFill>
                   <a:srgbClr val="7A869C"/>
                 </a:solidFill>
-                <a:latin typeface="나눔고딕코딩"/>
-                <a:ea typeface="나눔고딕코딩"/>
-                <a:cs typeface="나눔고딕코딩"/>
+                <a:latin typeface="D2Coding"/>
+                <a:ea typeface="D2Coding"/>
+                <a:cs typeface="D2Coding"/>
               </a:rPr>
               <a:t>1</a:t>
             </a:r>
@@ -8628,9 +8628,9 @@
                 <a:solidFill>
                   <a:srgbClr val="7A869C"/>
                 </a:solidFill>
-                <a:latin typeface="나눔고딕코딩"/>
-                <a:ea typeface="나눔고딕코딩"/>
-                <a:cs typeface="나눔고딕코딩"/>
+                <a:latin typeface="D2Coding"/>
+                <a:ea typeface="D2Coding"/>
+                <a:cs typeface="D2Coding"/>
               </a:rPr>
               <a:t>2</a:t>
             </a:r>
@@ -8646,9 +8646,9 @@
                 <a:solidFill>
                   <a:srgbClr val="7A869C"/>
                 </a:solidFill>
-                <a:latin typeface="나눔고딕코딩"/>
-                <a:ea typeface="나눔고딕코딩"/>
-                <a:cs typeface="나눔고딕코딩"/>
+                <a:latin typeface="D2Coding"/>
+                <a:ea typeface="D2Coding"/>
+                <a:cs typeface="D2Coding"/>
               </a:rPr>
               <a:t>3</a:t>
             </a:r>
@@ -8664,9 +8664,9 @@
                 <a:solidFill>
                   <a:srgbClr val="7A869C"/>
                 </a:solidFill>
-                <a:latin typeface="나눔고딕코딩"/>
-                <a:ea typeface="나눔고딕코딩"/>
-                <a:cs typeface="나눔고딕코딩"/>
+                <a:latin typeface="D2Coding"/>
+                <a:ea typeface="D2Coding"/>
+                <a:cs typeface="D2Coding"/>
               </a:rPr>
               <a:t>4</a:t>
             </a:r>
@@ -8682,9 +8682,9 @@
                 <a:solidFill>
                   <a:srgbClr val="7A869C"/>
                 </a:solidFill>
-                <a:latin typeface="나눔고딕코딩"/>
-                <a:ea typeface="나눔고딕코딩"/>
-                <a:cs typeface="나눔고딕코딩"/>
+                <a:latin typeface="D2Coding"/>
+                <a:ea typeface="D2Coding"/>
+                <a:cs typeface="D2Coding"/>
               </a:rPr>
               <a:t>5</a:t>
             </a:r>
@@ -8700,9 +8700,9 @@
                 <a:solidFill>
                   <a:srgbClr val="7A869C"/>
                 </a:solidFill>
-                <a:latin typeface="나눔고딕코딩"/>
-                <a:ea typeface="나눔고딕코딩"/>
-                <a:cs typeface="나눔고딕코딩"/>
+                <a:latin typeface="D2Coding"/>
+                <a:ea typeface="D2Coding"/>
+                <a:cs typeface="D2Coding"/>
               </a:rPr>
               <a:t>6</a:t>
             </a:r>
@@ -8741,9 +8741,9 @@
                 <a:solidFill>
                   <a:srgbClr val="E6EAF2"/>
                 </a:solidFill>
-                <a:latin typeface="나눔고딕코딩"/>
-                <a:ea typeface="나눔고딕코딩"/>
-                <a:cs typeface="나눔고딕코딩"/>
+                <a:latin typeface="D2Coding"/>
+                <a:ea typeface="D2Coding"/>
+                <a:cs typeface="D2Coding"/>
               </a:rPr>
               <a:t>CREATE INDEX idx_orders_date ON orders(order_date);</a:t>
             </a:r>
@@ -8759,9 +8759,9 @@
                 <a:solidFill>
                   <a:srgbClr val="E6EAF2"/>
                 </a:solidFill>
-                <a:latin typeface="나눔고딕코딩"/>
-                <a:ea typeface="나눔고딕코딩"/>
-                <a:cs typeface="나눔고딕코딩"/>
+                <a:latin typeface="D2Coding"/>
+                <a:ea typeface="D2Coding"/>
+                <a:cs typeface="D2Coding"/>
               </a:rPr>
               <a:t/>
             </a:r>
@@ -8777,9 +8777,9 @@
                 <a:solidFill>
                   <a:srgbClr val="E6EAF2"/>
                 </a:solidFill>
-                <a:latin typeface="나눔고딕코딩"/>
-                <a:ea typeface="나눔고딕코딩"/>
-                <a:cs typeface="나눔고딕코딩"/>
+                <a:latin typeface="D2Coding"/>
+                <a:ea typeface="D2Coding"/>
+                <a:cs typeface="D2Coding"/>
               </a:rPr>
               <a:t>CREATE INDEX idx_orders_cust_date ON orders(cust_id, order_date);</a:t>
             </a:r>
@@ -8795,9 +8795,9 @@
                 <a:solidFill>
                   <a:srgbClr val="E6EAF2"/>
                 </a:solidFill>
-                <a:latin typeface="나눔고딕코딩"/>
-                <a:ea typeface="나눔고딕코딩"/>
-                <a:cs typeface="나눔고딕코딩"/>
+                <a:latin typeface="D2Coding"/>
+                <a:ea typeface="D2Coding"/>
+                <a:cs typeface="D2Coding"/>
               </a:rPr>
               <a:t/>
             </a:r>
@@ -8813,9 +8813,9 @@
                 <a:solidFill>
                   <a:srgbClr val="E6EAF2"/>
                 </a:solidFill>
-                <a:latin typeface="나눔고딕코딩"/>
-                <a:ea typeface="나눔고딕코딩"/>
-                <a:cs typeface="나눔고딕코딩"/>
+                <a:latin typeface="D2Coding"/>
+                <a:ea typeface="D2Coding"/>
+                <a:cs typeface="D2Coding"/>
               </a:rPr>
               <a:t>SHOW INDEX FROM orders;</a:t>
             </a:r>
@@ -8831,9 +8831,9 @@
                 <a:solidFill>
                   <a:srgbClr val="E6EAF2"/>
                 </a:solidFill>
-                <a:latin typeface="나눔고딕코딩"/>
-                <a:ea typeface="나눔고딕코딩"/>
-                <a:cs typeface="나눔고딕코딩"/>
+                <a:latin typeface="D2Coding"/>
+                <a:ea typeface="D2Coding"/>
+                <a:cs typeface="D2Coding"/>
               </a:rPr>
               <a:t>DROP INDEX idx_orders_date ON orders;</a:t>
             </a:r>
@@ -13861,9 +13861,9 @@
                 <a:solidFill>
                   <a:srgbClr val="7A869C"/>
                 </a:solidFill>
-                <a:latin typeface="나눔고딕코딩"/>
-                <a:ea typeface="나눔고딕코딩"/>
-                <a:cs typeface="나눔고딕코딩"/>
+                <a:latin typeface="D2Coding"/>
+                <a:ea typeface="D2Coding"/>
+                <a:cs typeface="D2Coding"/>
               </a:rPr>
               <a:t>1</a:t>
             </a:r>
@@ -13879,9 +13879,9 @@
                 <a:solidFill>
                   <a:srgbClr val="7A869C"/>
                 </a:solidFill>
-                <a:latin typeface="나눔고딕코딩"/>
-                <a:ea typeface="나눔고딕코딩"/>
-                <a:cs typeface="나눔고딕코딩"/>
+                <a:latin typeface="D2Coding"/>
+                <a:ea typeface="D2Coding"/>
+                <a:cs typeface="D2Coding"/>
               </a:rPr>
               <a:t>2</a:t>
             </a:r>
@@ -13897,9 +13897,9 @@
                 <a:solidFill>
                   <a:srgbClr val="7A869C"/>
                 </a:solidFill>
-                <a:latin typeface="나눔고딕코딩"/>
-                <a:ea typeface="나눔고딕코딩"/>
-                <a:cs typeface="나눔고딕코딩"/>
+                <a:latin typeface="D2Coding"/>
+                <a:ea typeface="D2Coding"/>
+                <a:cs typeface="D2Coding"/>
               </a:rPr>
               <a:t>3</a:t>
             </a:r>
@@ -13915,9 +13915,9 @@
                 <a:solidFill>
                   <a:srgbClr val="7A869C"/>
                 </a:solidFill>
-                <a:latin typeface="나눔고딕코딩"/>
-                <a:ea typeface="나눔고딕코딩"/>
-                <a:cs typeface="나눔고딕코딩"/>
+                <a:latin typeface="D2Coding"/>
+                <a:ea typeface="D2Coding"/>
+                <a:cs typeface="D2Coding"/>
               </a:rPr>
               <a:t>4</a:t>
             </a:r>
@@ -13933,9 +13933,9 @@
                 <a:solidFill>
                   <a:srgbClr val="7A869C"/>
                 </a:solidFill>
-                <a:latin typeface="나눔고딕코딩"/>
-                <a:ea typeface="나눔고딕코딩"/>
-                <a:cs typeface="나눔고딕코딩"/>
+                <a:latin typeface="D2Coding"/>
+                <a:ea typeface="D2Coding"/>
+                <a:cs typeface="D2Coding"/>
               </a:rPr>
               <a:t>5</a:t>
             </a:r>
@@ -13951,9 +13951,9 @@
                 <a:solidFill>
                   <a:srgbClr val="7A869C"/>
                 </a:solidFill>
-                <a:latin typeface="나눔고딕코딩"/>
-                <a:ea typeface="나눔고딕코딩"/>
-                <a:cs typeface="나눔고딕코딩"/>
+                <a:latin typeface="D2Coding"/>
+                <a:ea typeface="D2Coding"/>
+                <a:cs typeface="D2Coding"/>
               </a:rPr>
               <a:t>6</a:t>
             </a:r>
@@ -13969,9 +13969,9 @@
                 <a:solidFill>
                   <a:srgbClr val="7A869C"/>
                 </a:solidFill>
-                <a:latin typeface="나눔고딕코딩"/>
-                <a:ea typeface="나눔고딕코딩"/>
-                <a:cs typeface="나눔고딕코딩"/>
+                <a:latin typeface="D2Coding"/>
+                <a:ea typeface="D2Coding"/>
+                <a:cs typeface="D2Coding"/>
               </a:rPr>
               <a:t>7</a:t>
             </a:r>
@@ -13987,9 +13987,9 @@
                 <a:solidFill>
                   <a:srgbClr val="7A869C"/>
                 </a:solidFill>
-                <a:latin typeface="나눔고딕코딩"/>
-                <a:ea typeface="나눔고딕코딩"/>
-                <a:cs typeface="나눔고딕코딩"/>
+                <a:latin typeface="D2Coding"/>
+                <a:ea typeface="D2Coding"/>
+                <a:cs typeface="D2Coding"/>
               </a:rPr>
               <a:t>8</a:t>
             </a:r>
@@ -14028,9 +14028,9 @@
                 <a:solidFill>
                   <a:srgbClr val="E6EAF2"/>
                 </a:solidFill>
-                <a:latin typeface="나눔고딕코딩"/>
-                <a:ea typeface="나눔고딕코딩"/>
-                <a:cs typeface="나눔고딕코딩"/>
+                <a:latin typeface="D2Coding"/>
+                <a:ea typeface="D2Coding"/>
+                <a:cs typeface="D2Coding"/>
               </a:rPr>
               <a:t>-- ① 인덱스 컬럼에 함수·연산을 적용</a:t>
             </a:r>
@@ -14046,9 +14046,9 @@
                 <a:solidFill>
                   <a:srgbClr val="E6EAF2"/>
                 </a:solidFill>
-                <a:latin typeface="나눔고딕코딩"/>
-                <a:ea typeface="나눔고딕코딩"/>
-                <a:cs typeface="나눔고딕코딩"/>
+                <a:latin typeface="D2Coding"/>
+                <a:ea typeface="D2Coding"/>
+                <a:cs typeface="D2Coding"/>
               </a:rPr>
               <a:t>SELECT * FROM orders WHERE YEAR(order_date) = 2026;</a:t>
             </a:r>
@@ -14064,9 +14064,9 @@
                 <a:solidFill>
                   <a:srgbClr val="E6EAF2"/>
                 </a:solidFill>
-                <a:latin typeface="나눔고딕코딩"/>
-                <a:ea typeface="나눔고딕코딩"/>
-                <a:cs typeface="나눔고딕코딩"/>
+                <a:latin typeface="D2Coding"/>
+                <a:ea typeface="D2Coding"/>
+                <a:cs typeface="D2Coding"/>
               </a:rPr>
               <a:t>SELECT * FROM orders WHERE order_date &gt;= '2026-01-01'</a:t>
             </a:r>
@@ -14082,9 +14082,9 @@
                 <a:solidFill>
                   <a:srgbClr val="E6EAF2"/>
                 </a:solidFill>
-                <a:latin typeface="나눔고딕코딩"/>
-                <a:ea typeface="나눔고딕코딩"/>
-                <a:cs typeface="나눔고딕코딩"/>
+                <a:latin typeface="D2Coding"/>
+                <a:ea typeface="D2Coding"/>
+                <a:cs typeface="D2Coding"/>
               </a:rPr>
               <a:t>                       AND order_date &lt;  '2027-01-01';</a:t>
             </a:r>
@@ -14100,9 +14100,9 @@
                 <a:solidFill>
                   <a:srgbClr val="E6EAF2"/>
                 </a:solidFill>
-                <a:latin typeface="나눔고딕코딩"/>
-                <a:ea typeface="나눔고딕코딩"/>
-                <a:cs typeface="나눔고딕코딩"/>
+                <a:latin typeface="D2Coding"/>
+                <a:ea typeface="D2Coding"/>
+                <a:cs typeface="D2Coding"/>
               </a:rPr>
               <a:t/>
             </a:r>
@@ -14118,9 +14118,9 @@
                 <a:solidFill>
                   <a:srgbClr val="E6EAF2"/>
                 </a:solidFill>
-                <a:latin typeface="나눔고딕코딩"/>
-                <a:ea typeface="나눔고딕코딩"/>
-                <a:cs typeface="나눔고딕코딩"/>
+                <a:latin typeface="D2Coding"/>
+                <a:ea typeface="D2Coding"/>
+                <a:cs typeface="D2Coding"/>
               </a:rPr>
               <a:t>-- ② LIKE 패턴이 %로 시작</a:t>
             </a:r>
@@ -14136,9 +14136,9 @@
                 <a:solidFill>
                   <a:srgbClr val="E6EAF2"/>
                 </a:solidFill>
-                <a:latin typeface="나눔고딕코딩"/>
-                <a:ea typeface="나눔고딕코딩"/>
-                <a:cs typeface="나눔고딕코딩"/>
+                <a:latin typeface="D2Coding"/>
+                <a:ea typeface="D2Coding"/>
+                <a:cs typeface="D2Coding"/>
               </a:rPr>
               <a:t>SELECT * FROM products WHERE name LIKE '%노트';</a:t>
             </a:r>
@@ -14154,9 +14154,9 @@
                 <a:solidFill>
                   <a:srgbClr val="E6EAF2"/>
                 </a:solidFill>
-                <a:latin typeface="나눔고딕코딩"/>
-                <a:ea typeface="나눔고딕코딩"/>
-                <a:cs typeface="나눔고딕코딩"/>
+                <a:latin typeface="D2Coding"/>
+                <a:ea typeface="D2Coding"/>
+                <a:cs typeface="D2Coding"/>
               </a:rPr>
               <a:t>SELECT * FROM products WHERE name LIKE '무선%';</a:t>
             </a:r>
@@ -16164,9 +16164,9 @@
                 <a:solidFill>
                   <a:srgbClr val="7A869C"/>
                 </a:solidFill>
-                <a:latin typeface="나눔고딕코딩"/>
-                <a:ea typeface="나눔고딕코딩"/>
-                <a:cs typeface="나눔고딕코딩"/>
+                <a:latin typeface="D2Coding"/>
+                <a:ea typeface="D2Coding"/>
+                <a:cs typeface="D2Coding"/>
               </a:rPr>
               <a:t>1</a:t>
             </a:r>
@@ -16182,9 +16182,9 @@
                 <a:solidFill>
                   <a:srgbClr val="7A869C"/>
                 </a:solidFill>
-                <a:latin typeface="나눔고딕코딩"/>
-                <a:ea typeface="나눔고딕코딩"/>
-                <a:cs typeface="나눔고딕코딩"/>
+                <a:latin typeface="D2Coding"/>
+                <a:ea typeface="D2Coding"/>
+                <a:cs typeface="D2Coding"/>
               </a:rPr>
               <a:t>2</a:t>
             </a:r>
@@ -16200,9 +16200,9 @@
                 <a:solidFill>
                   <a:srgbClr val="7A869C"/>
                 </a:solidFill>
-                <a:latin typeface="나눔고딕코딩"/>
-                <a:ea typeface="나눔고딕코딩"/>
-                <a:cs typeface="나눔고딕코딩"/>
+                <a:latin typeface="D2Coding"/>
+                <a:ea typeface="D2Coding"/>
+                <a:cs typeface="D2Coding"/>
               </a:rPr>
               <a:t>3</a:t>
             </a:r>
@@ -16218,9 +16218,9 @@
                 <a:solidFill>
                   <a:srgbClr val="7A869C"/>
                 </a:solidFill>
-                <a:latin typeface="나눔고딕코딩"/>
-                <a:ea typeface="나눔고딕코딩"/>
-                <a:cs typeface="나눔고딕코딩"/>
+                <a:latin typeface="D2Coding"/>
+                <a:ea typeface="D2Coding"/>
+                <a:cs typeface="D2Coding"/>
               </a:rPr>
               <a:t>4</a:t>
             </a:r>
@@ -16236,9 +16236,9 @@
                 <a:solidFill>
                   <a:srgbClr val="7A869C"/>
                 </a:solidFill>
-                <a:latin typeface="나눔고딕코딩"/>
-                <a:ea typeface="나눔고딕코딩"/>
-                <a:cs typeface="나눔고딕코딩"/>
+                <a:latin typeface="D2Coding"/>
+                <a:ea typeface="D2Coding"/>
+                <a:cs typeface="D2Coding"/>
               </a:rPr>
               <a:t>5</a:t>
             </a:r>
@@ -16254,9 +16254,9 @@
                 <a:solidFill>
                   <a:srgbClr val="7A869C"/>
                 </a:solidFill>
-                <a:latin typeface="나눔고딕코딩"/>
-                <a:ea typeface="나눔고딕코딩"/>
-                <a:cs typeface="나눔고딕코딩"/>
+                <a:latin typeface="D2Coding"/>
+                <a:ea typeface="D2Coding"/>
+                <a:cs typeface="D2Coding"/>
               </a:rPr>
               <a:t>6</a:t>
             </a:r>
@@ -16272,9 +16272,9 @@
                 <a:solidFill>
                   <a:srgbClr val="7A869C"/>
                 </a:solidFill>
-                <a:latin typeface="나눔고딕코딩"/>
-                <a:ea typeface="나눔고딕코딩"/>
-                <a:cs typeface="나눔고딕코딩"/>
+                <a:latin typeface="D2Coding"/>
+                <a:ea typeface="D2Coding"/>
+                <a:cs typeface="D2Coding"/>
               </a:rPr>
               <a:t>7</a:t>
             </a:r>
@@ -16290,9 +16290,9 @@
                 <a:solidFill>
                   <a:srgbClr val="7A869C"/>
                 </a:solidFill>
-                <a:latin typeface="나눔고딕코딩"/>
-                <a:ea typeface="나눔고딕코딩"/>
-                <a:cs typeface="나눔고딕코딩"/>
+                <a:latin typeface="D2Coding"/>
+                <a:ea typeface="D2Coding"/>
+                <a:cs typeface="D2Coding"/>
               </a:rPr>
               <a:t>8</a:t>
             </a:r>
@@ -16308,9 +16308,9 @@
                 <a:solidFill>
                   <a:srgbClr val="7A869C"/>
                 </a:solidFill>
-                <a:latin typeface="나눔고딕코딩"/>
-                <a:ea typeface="나눔고딕코딩"/>
-                <a:cs typeface="나눔고딕코딩"/>
+                <a:latin typeface="D2Coding"/>
+                <a:ea typeface="D2Coding"/>
+                <a:cs typeface="D2Coding"/>
               </a:rPr>
               <a:t>9</a:t>
             </a:r>
@@ -16349,9 +16349,9 @@
                 <a:solidFill>
                   <a:srgbClr val="E6EAF2"/>
                 </a:solidFill>
-                <a:latin typeface="나눔고딕코딩"/>
-                <a:ea typeface="나눔고딕코딩"/>
-                <a:cs typeface="나눔고딕코딩"/>
+                <a:latin typeface="D2Coding"/>
+                <a:ea typeface="D2Coding"/>
+                <a:cs typeface="D2Coding"/>
               </a:rPr>
               <a:t>-- ③ 부정 조건 (!=, NOT IN, IS NOT NULL)</a:t>
             </a:r>
@@ -16367,9 +16367,9 @@
                 <a:solidFill>
                   <a:srgbClr val="E6EAF2"/>
                 </a:solidFill>
-                <a:latin typeface="나눔고딕코딩"/>
-                <a:ea typeface="나눔고딕코딩"/>
-                <a:cs typeface="나눔고딕코딩"/>
+                <a:latin typeface="D2Coding"/>
+                <a:ea typeface="D2Coding"/>
+                <a:cs typeface="D2Coding"/>
               </a:rPr>
               <a:t>SELECT * FROM orders WHERE status != '취소';</a:t>
             </a:r>
@@ -16385,9 +16385,9 @@
                 <a:solidFill>
                   <a:srgbClr val="E6EAF2"/>
                 </a:solidFill>
-                <a:latin typeface="나눔고딕코딩"/>
-                <a:ea typeface="나눔고딕코딩"/>
-                <a:cs typeface="나눔고딕코딩"/>
+                <a:latin typeface="D2Coding"/>
+                <a:ea typeface="D2Coding"/>
+                <a:cs typeface="D2Coding"/>
               </a:rPr>
               <a:t/>
             </a:r>
@@ -16403,9 +16403,9 @@
                 <a:solidFill>
                   <a:srgbClr val="E6EAF2"/>
                 </a:solidFill>
-                <a:latin typeface="나눔고딕코딩"/>
-                <a:ea typeface="나눔고딕코딩"/>
-                <a:cs typeface="나눔고딕코딩"/>
+                <a:latin typeface="D2Coding"/>
+                <a:ea typeface="D2Coding"/>
+                <a:cs typeface="D2Coding"/>
               </a:rPr>
               <a:t>-- ④ 복합 인덱스의 선행 컬럼을 조건에서 생략</a:t>
             </a:r>
@@ -16421,9 +16421,9 @@
                 <a:solidFill>
                   <a:srgbClr val="E6EAF2"/>
                 </a:solidFill>
-                <a:latin typeface="나눔고딕코딩"/>
-                <a:ea typeface="나눔고딕코딩"/>
-                <a:cs typeface="나눔고딕코딩"/>
+                <a:latin typeface="D2Coding"/>
+                <a:ea typeface="D2Coding"/>
+                <a:cs typeface="D2Coding"/>
               </a:rPr>
               <a:t>SELECT * FROM orders WHERE cust_id = 'C001';</a:t>
             </a:r>
@@ -16439,9 +16439,9 @@
                 <a:solidFill>
                   <a:srgbClr val="E6EAF2"/>
                 </a:solidFill>
-                <a:latin typeface="나눔고딕코딩"/>
-                <a:ea typeface="나눔고딕코딩"/>
-                <a:cs typeface="나눔고딕코딩"/>
+                <a:latin typeface="D2Coding"/>
+                <a:ea typeface="D2Coding"/>
+                <a:cs typeface="D2Coding"/>
               </a:rPr>
               <a:t>SELECT * FROM orders WHERE order_date = '2026-01-10';</a:t>
             </a:r>
@@ -16457,9 +16457,9 @@
                 <a:solidFill>
                   <a:srgbClr val="E6EAF2"/>
                 </a:solidFill>
-                <a:latin typeface="나눔고딕코딩"/>
-                <a:ea typeface="나눔고딕코딩"/>
-                <a:cs typeface="나눔고딕코딩"/>
+                <a:latin typeface="D2Coding"/>
+                <a:ea typeface="D2Coding"/>
+                <a:cs typeface="D2Coding"/>
               </a:rPr>
               <a:t/>
             </a:r>
@@ -16475,9 +16475,9 @@
                 <a:solidFill>
                   <a:srgbClr val="E6EAF2"/>
                 </a:solidFill>
-                <a:latin typeface="나눔고딕코딩"/>
-                <a:ea typeface="나눔고딕코딩"/>
-                <a:cs typeface="나눔고딕코딩"/>
+                <a:latin typeface="D2Coding"/>
+                <a:ea typeface="D2Coding"/>
+                <a:cs typeface="D2Coding"/>
               </a:rPr>
               <a:t>-- ⑤ 자료형이 다른 값과 비교 (암시적 형 변환)</a:t>
             </a:r>
@@ -16493,9 +16493,9 @@
                 <a:solidFill>
                   <a:srgbClr val="E6EAF2"/>
                 </a:solidFill>
-                <a:latin typeface="나눔고딕코딩"/>
-                <a:ea typeface="나눔고딕코딩"/>
-                <a:cs typeface="나눔고딕코딩"/>
+                <a:latin typeface="D2Coding"/>
+                <a:ea typeface="D2Coding"/>
+                <a:cs typeface="D2Coding"/>
               </a:rPr>
               <a:t>SELECT * FROM customers WHERE cust_id = 1001;</a:t>
             </a:r>
@@ -18383,9 +18383,9 @@
                 <a:solidFill>
                   <a:srgbClr val="7A869C"/>
                 </a:solidFill>
-                <a:latin typeface="나눔고딕코딩"/>
-                <a:ea typeface="나눔고딕코딩"/>
-                <a:cs typeface="나눔고딕코딩"/>
+                <a:latin typeface="D2Coding"/>
+                <a:ea typeface="D2Coding"/>
+                <a:cs typeface="D2Coding"/>
               </a:rPr>
               <a:t>1</a:t>
             </a:r>
@@ -18401,9 +18401,9 @@
                 <a:solidFill>
                   <a:srgbClr val="7A869C"/>
                 </a:solidFill>
-                <a:latin typeface="나눔고딕코딩"/>
-                <a:ea typeface="나눔고딕코딩"/>
-                <a:cs typeface="나눔고딕코딩"/>
+                <a:latin typeface="D2Coding"/>
+                <a:ea typeface="D2Coding"/>
+                <a:cs typeface="D2Coding"/>
               </a:rPr>
               <a:t>2</a:t>
             </a:r>
@@ -18442,9 +18442,9 @@
                 <a:solidFill>
                   <a:srgbClr val="E6EAF2"/>
                 </a:solidFill>
-                <a:latin typeface="나눔고딕코딩"/>
-                <a:ea typeface="나눔고딕코딩"/>
-                <a:cs typeface="나눔고딕코딩"/>
+                <a:latin typeface="D2Coding"/>
+                <a:ea typeface="D2Coding"/>
+                <a:cs typeface="D2Coding"/>
               </a:rPr>
               <a:t>EXPLAIN SELECT * FROM orders WHERE cust_id = 'C001';</a:t>
             </a:r>
@@ -18460,9 +18460,9 @@
                 <a:solidFill>
                   <a:srgbClr val="E6EAF2"/>
                 </a:solidFill>
-                <a:latin typeface="나눔고딕코딩"/>
-                <a:ea typeface="나눔고딕코딩"/>
-                <a:cs typeface="나눔고딕코딩"/>
+                <a:latin typeface="D2Coding"/>
+                <a:ea typeface="D2Coding"/>
+                <a:cs typeface="D2Coding"/>
               </a:rPr>
               <a:t>EXPLAIN ANALYZE SELECT * FROM orders WHERE cust_id = 'C001';</a:t>
             </a:r>
@@ -25814,9 +25814,9 @@
                 <a:solidFill>
                   <a:srgbClr val="7A869C"/>
                 </a:solidFill>
-                <a:latin typeface="나눔고딕코딩"/>
-                <a:ea typeface="나눔고딕코딩"/>
-                <a:cs typeface="나눔고딕코딩"/>
+                <a:latin typeface="D2Coding"/>
+                <a:ea typeface="D2Coding"/>
+                <a:cs typeface="D2Coding"/>
               </a:rPr>
               <a:t>1</a:t>
             </a:r>
@@ -25832,9 +25832,9 @@
                 <a:solidFill>
                   <a:srgbClr val="7A869C"/>
                 </a:solidFill>
-                <a:latin typeface="나눔고딕코딩"/>
-                <a:ea typeface="나눔고딕코딩"/>
-                <a:cs typeface="나눔고딕코딩"/>
+                <a:latin typeface="D2Coding"/>
+                <a:ea typeface="D2Coding"/>
+                <a:cs typeface="D2Coding"/>
               </a:rPr>
               <a:t>2</a:t>
             </a:r>
@@ -25850,9 +25850,9 @@
                 <a:solidFill>
                   <a:srgbClr val="7A869C"/>
                 </a:solidFill>
-                <a:latin typeface="나눔고딕코딩"/>
-                <a:ea typeface="나눔고딕코딩"/>
-                <a:cs typeface="나눔고딕코딩"/>
+                <a:latin typeface="D2Coding"/>
+                <a:ea typeface="D2Coding"/>
+                <a:cs typeface="D2Coding"/>
               </a:rPr>
               <a:t>3</a:t>
             </a:r>
@@ -25868,9 +25868,9 @@
                 <a:solidFill>
                   <a:srgbClr val="7A869C"/>
                 </a:solidFill>
-                <a:latin typeface="나눔고딕코딩"/>
-                <a:ea typeface="나눔고딕코딩"/>
-                <a:cs typeface="나눔고딕코딩"/>
+                <a:latin typeface="D2Coding"/>
+                <a:ea typeface="D2Coding"/>
+                <a:cs typeface="D2Coding"/>
               </a:rPr>
               <a:t>4</a:t>
             </a:r>
@@ -25886,9 +25886,9 @@
                 <a:solidFill>
                   <a:srgbClr val="7A869C"/>
                 </a:solidFill>
-                <a:latin typeface="나눔고딕코딩"/>
-                <a:ea typeface="나눔고딕코딩"/>
-                <a:cs typeface="나눔고딕코딩"/>
+                <a:latin typeface="D2Coding"/>
+                <a:ea typeface="D2Coding"/>
+                <a:cs typeface="D2Coding"/>
               </a:rPr>
               <a:t>5</a:t>
             </a:r>
@@ -25927,9 +25927,9 @@
                 <a:solidFill>
                   <a:srgbClr val="E6EAF2"/>
                 </a:solidFill>
-                <a:latin typeface="나눔고딕코딩"/>
-                <a:ea typeface="나눔고딕코딩"/>
-                <a:cs typeface="나눔고딕코딩"/>
+                <a:latin typeface="D2Coding"/>
+                <a:ea typeface="D2Coding"/>
+                <a:cs typeface="D2Coding"/>
               </a:rPr>
               <a:t>CREATE USER 'parttime'@'localhost' IDENTIFIED BY 'pt_2026!';</a:t>
             </a:r>
@@ -25945,9 +25945,9 @@
                 <a:solidFill>
                   <a:srgbClr val="E6EAF2"/>
                 </a:solidFill>
-                <a:latin typeface="나눔고딕코딩"/>
-                <a:ea typeface="나눔고딕코딩"/>
-                <a:cs typeface="나눔고딕코딩"/>
+                <a:latin typeface="D2Coding"/>
+                <a:ea typeface="D2Coding"/>
+                <a:cs typeface="D2Coding"/>
               </a:rPr>
               <a:t/>
             </a:r>
@@ -25963,9 +25963,9 @@
                 <a:solidFill>
                   <a:srgbClr val="E6EAF2"/>
                 </a:solidFill>
-                <a:latin typeface="나눔고딕코딩"/>
-                <a:ea typeface="나눔고딕코딩"/>
-                <a:cs typeface="나눔고딕코딩"/>
+                <a:latin typeface="D2Coding"/>
+                <a:ea typeface="D2Coding"/>
+                <a:cs typeface="D2Coding"/>
               </a:rPr>
               <a:t>GRANT SELECT ON daon.products TO 'parttime'@'localhost';</a:t>
             </a:r>
@@ -25981,9 +25981,9 @@
                 <a:solidFill>
                   <a:srgbClr val="E6EAF2"/>
                 </a:solidFill>
-                <a:latin typeface="나눔고딕코딩"/>
-                <a:ea typeface="나눔고딕코딩"/>
-                <a:cs typeface="나눔고딕코딩"/>
+                <a:latin typeface="D2Coding"/>
+                <a:ea typeface="D2Coding"/>
+                <a:cs typeface="D2Coding"/>
               </a:rPr>
               <a:t>GRANT SELECT, INSERT, UPDATE ON daon.* TO 'manager'@'localhost';</a:t>
             </a:r>
@@ -25999,9 +25999,9 @@
                 <a:solidFill>
                   <a:srgbClr val="E6EAF2"/>
                 </a:solidFill>
-                <a:latin typeface="나눔고딕코딩"/>
-                <a:ea typeface="나눔고딕코딩"/>
-                <a:cs typeface="나눔고딕코딩"/>
+                <a:latin typeface="D2Coding"/>
+                <a:ea typeface="D2Coding"/>
+                <a:cs typeface="D2Coding"/>
               </a:rPr>
               <a:t>GRANT ALL PRIVILEGES ON daon.* TO 'admin'@'localhost' WITH GRANT OPTION;</a:t>
             </a:r>
@@ -28069,9 +28069,9 @@
                 <a:solidFill>
                   <a:srgbClr val="7A869C"/>
                 </a:solidFill>
-                <a:latin typeface="나눔고딕코딩"/>
-                <a:ea typeface="나눔고딕코딩"/>
-                <a:cs typeface="나눔고딕코딩"/>
+                <a:latin typeface="D2Coding"/>
+                <a:ea typeface="D2Coding"/>
+                <a:cs typeface="D2Coding"/>
               </a:rPr>
               <a:t>1</a:t>
             </a:r>
@@ -28087,9 +28087,9 @@
                 <a:solidFill>
                   <a:srgbClr val="7A869C"/>
                 </a:solidFill>
-                <a:latin typeface="나눔고딕코딩"/>
-                <a:ea typeface="나눔고딕코딩"/>
-                <a:cs typeface="나눔고딕코딩"/>
+                <a:latin typeface="D2Coding"/>
+                <a:ea typeface="D2Coding"/>
+                <a:cs typeface="D2Coding"/>
               </a:rPr>
               <a:t>2</a:t>
             </a:r>
@@ -28105,9 +28105,9 @@
                 <a:solidFill>
                   <a:srgbClr val="7A869C"/>
                 </a:solidFill>
-                <a:latin typeface="나눔고딕코딩"/>
-                <a:ea typeface="나눔고딕코딩"/>
-                <a:cs typeface="나눔고딕코딩"/>
+                <a:latin typeface="D2Coding"/>
+                <a:ea typeface="D2Coding"/>
+                <a:cs typeface="D2Coding"/>
               </a:rPr>
               <a:t>3</a:t>
             </a:r>
@@ -28123,9 +28123,9 @@
                 <a:solidFill>
                   <a:srgbClr val="7A869C"/>
                 </a:solidFill>
-                <a:latin typeface="나눔고딕코딩"/>
-                <a:ea typeface="나눔고딕코딩"/>
-                <a:cs typeface="나눔고딕코딩"/>
+                <a:latin typeface="D2Coding"/>
+                <a:ea typeface="D2Coding"/>
+                <a:cs typeface="D2Coding"/>
               </a:rPr>
               <a:t>4</a:t>
             </a:r>
@@ -28141,9 +28141,9 @@
                 <a:solidFill>
                   <a:srgbClr val="7A869C"/>
                 </a:solidFill>
-                <a:latin typeface="나눔고딕코딩"/>
-                <a:ea typeface="나눔고딕코딩"/>
-                <a:cs typeface="나눔고딕코딩"/>
+                <a:latin typeface="D2Coding"/>
+                <a:ea typeface="D2Coding"/>
+                <a:cs typeface="D2Coding"/>
               </a:rPr>
               <a:t>5</a:t>
             </a:r>
@@ -28159,9 +28159,9 @@
                 <a:solidFill>
                   <a:srgbClr val="7A869C"/>
                 </a:solidFill>
-                <a:latin typeface="나눔고딕코딩"/>
-                <a:ea typeface="나눔고딕코딩"/>
-                <a:cs typeface="나눔고딕코딩"/>
+                <a:latin typeface="D2Coding"/>
+                <a:ea typeface="D2Coding"/>
+                <a:cs typeface="D2Coding"/>
               </a:rPr>
               <a:t>6</a:t>
             </a:r>
@@ -28177,9 +28177,9 @@
                 <a:solidFill>
                   <a:srgbClr val="7A869C"/>
                 </a:solidFill>
-                <a:latin typeface="나눔고딕코딩"/>
-                <a:ea typeface="나눔고딕코딩"/>
-                <a:cs typeface="나눔고딕코딩"/>
+                <a:latin typeface="D2Coding"/>
+                <a:ea typeface="D2Coding"/>
+                <a:cs typeface="D2Coding"/>
               </a:rPr>
               <a:t>7</a:t>
             </a:r>
@@ -28195,9 +28195,9 @@
                 <a:solidFill>
                   <a:srgbClr val="7A869C"/>
                 </a:solidFill>
-                <a:latin typeface="나눔고딕코딩"/>
-                <a:ea typeface="나눔고딕코딩"/>
-                <a:cs typeface="나눔고딕코딩"/>
+                <a:latin typeface="D2Coding"/>
+                <a:ea typeface="D2Coding"/>
+                <a:cs typeface="D2Coding"/>
               </a:rPr>
               <a:t>8</a:t>
             </a:r>
@@ -28236,9 +28236,9 @@
                 <a:solidFill>
                   <a:srgbClr val="E6EAF2"/>
                 </a:solidFill>
-                <a:latin typeface="나눔고딕코딩"/>
-                <a:ea typeface="나눔고딕코딩"/>
-                <a:cs typeface="나눔고딕코딩"/>
+                <a:latin typeface="D2Coding"/>
+                <a:ea typeface="D2Coding"/>
+                <a:cs typeface="D2Coding"/>
               </a:rPr>
               <a:t>GRANT SELECT (cust_id, name, grade) ON daon.customers</a:t>
             </a:r>
@@ -28254,9 +28254,9 @@
                 <a:solidFill>
                   <a:srgbClr val="E6EAF2"/>
                 </a:solidFill>
-                <a:latin typeface="나눔고딕코딩"/>
-                <a:ea typeface="나눔고딕코딩"/>
-                <a:cs typeface="나눔고딕코딩"/>
+                <a:latin typeface="D2Coding"/>
+                <a:ea typeface="D2Coding"/>
+                <a:cs typeface="D2Coding"/>
               </a:rPr>
               <a:t>      TO 'parttime'@'localhost';</a:t>
             </a:r>
@@ -28272,9 +28272,9 @@
                 <a:solidFill>
                   <a:srgbClr val="E6EAF2"/>
                 </a:solidFill>
-                <a:latin typeface="나눔고딕코딩"/>
-                <a:ea typeface="나눔고딕코딩"/>
-                <a:cs typeface="나눔고딕코딩"/>
+                <a:latin typeface="D2Coding"/>
+                <a:ea typeface="D2Coding"/>
+                <a:cs typeface="D2Coding"/>
               </a:rPr>
               <a:t/>
             </a:r>
@@ -28290,9 +28290,9 @@
                 <a:solidFill>
                   <a:srgbClr val="E6EAF2"/>
                 </a:solidFill>
-                <a:latin typeface="나눔고딕코딩"/>
-                <a:ea typeface="나눔고딕코딩"/>
-                <a:cs typeface="나눔고딕코딩"/>
+                <a:latin typeface="D2Coding"/>
+                <a:ea typeface="D2Coding"/>
+                <a:cs typeface="D2Coding"/>
               </a:rPr>
               <a:t>SHOW GRANTS FOR 'parttime'@'localhost';</a:t>
             </a:r>
@@ -28308,9 +28308,9 @@
                 <a:solidFill>
                   <a:srgbClr val="E6EAF2"/>
                 </a:solidFill>
-                <a:latin typeface="나눔고딕코딩"/>
-                <a:ea typeface="나눔고딕코딩"/>
-                <a:cs typeface="나눔고딕코딩"/>
+                <a:latin typeface="D2Coding"/>
+                <a:ea typeface="D2Coding"/>
+                <a:cs typeface="D2Coding"/>
               </a:rPr>
               <a:t>REVOKE INSERT, UPDATE ON daon.* FROM 'manager'@'localhost';</a:t>
             </a:r>
@@ -28326,9 +28326,9 @@
                 <a:solidFill>
                   <a:srgbClr val="E6EAF2"/>
                 </a:solidFill>
-                <a:latin typeface="나눔고딕코딩"/>
-                <a:ea typeface="나눔고딕코딩"/>
-                <a:cs typeface="나눔고딕코딩"/>
+                <a:latin typeface="D2Coding"/>
+                <a:ea typeface="D2Coding"/>
+                <a:cs typeface="D2Coding"/>
               </a:rPr>
               <a:t>REVOKE ALL PRIVILEGES, GRANT OPTION FROM 'admin'@'localhost';</a:t>
             </a:r>
@@ -28344,9 +28344,9 @@
                 <a:solidFill>
                   <a:srgbClr val="E6EAF2"/>
                 </a:solidFill>
-                <a:latin typeface="나눔고딕코딩"/>
-                <a:ea typeface="나눔고딕코딩"/>
-                <a:cs typeface="나눔고딕코딩"/>
+                <a:latin typeface="D2Coding"/>
+                <a:ea typeface="D2Coding"/>
+                <a:cs typeface="D2Coding"/>
               </a:rPr>
               <a:t/>
             </a:r>
@@ -28362,9 +28362,9 @@
                 <a:solidFill>
                   <a:srgbClr val="E6EAF2"/>
                 </a:solidFill>
-                <a:latin typeface="나눔고딕코딩"/>
-                <a:ea typeface="나눔고딕코딩"/>
-                <a:cs typeface="나눔고딕코딩"/>
+                <a:latin typeface="D2Coding"/>
+                <a:ea typeface="D2Coding"/>
+                <a:cs typeface="D2Coding"/>
               </a:rPr>
               <a:t>FLUSH PRIVILEGES;</a:t>
             </a:r>
@@ -30372,9 +30372,9 @@
                 <a:solidFill>
                   <a:srgbClr val="7A869C"/>
                 </a:solidFill>
-                <a:latin typeface="나눔고딕코딩"/>
-                <a:ea typeface="나눔고딕코딩"/>
-                <a:cs typeface="나눔고딕코딩"/>
+                <a:latin typeface="D2Coding"/>
+                <a:ea typeface="D2Coding"/>
+                <a:cs typeface="D2Coding"/>
               </a:rPr>
               <a:t>1</a:t>
             </a:r>
@@ -30390,9 +30390,9 @@
                 <a:solidFill>
                   <a:srgbClr val="7A869C"/>
                 </a:solidFill>
-                <a:latin typeface="나눔고딕코딩"/>
-                <a:ea typeface="나눔고딕코딩"/>
-                <a:cs typeface="나눔고딕코딩"/>
+                <a:latin typeface="D2Coding"/>
+                <a:ea typeface="D2Coding"/>
+                <a:cs typeface="D2Coding"/>
               </a:rPr>
               <a:t>2</a:t>
             </a:r>
@@ -30408,9 +30408,9 @@
                 <a:solidFill>
                   <a:srgbClr val="7A869C"/>
                 </a:solidFill>
-                <a:latin typeface="나눔고딕코딩"/>
-                <a:ea typeface="나눔고딕코딩"/>
-                <a:cs typeface="나눔고딕코딩"/>
+                <a:latin typeface="D2Coding"/>
+                <a:ea typeface="D2Coding"/>
+                <a:cs typeface="D2Coding"/>
               </a:rPr>
               <a:t>3</a:t>
             </a:r>
@@ -30426,9 +30426,9 @@
                 <a:solidFill>
                   <a:srgbClr val="7A869C"/>
                 </a:solidFill>
-                <a:latin typeface="나눔고딕코딩"/>
-                <a:ea typeface="나눔고딕코딩"/>
-                <a:cs typeface="나눔고딕코딩"/>
+                <a:latin typeface="D2Coding"/>
+                <a:ea typeface="D2Coding"/>
+                <a:cs typeface="D2Coding"/>
               </a:rPr>
               <a:t>4</a:t>
             </a:r>
@@ -30444,9 +30444,9 @@
                 <a:solidFill>
                   <a:srgbClr val="7A869C"/>
                 </a:solidFill>
-                <a:latin typeface="나눔고딕코딩"/>
-                <a:ea typeface="나눔고딕코딩"/>
-                <a:cs typeface="나눔고딕코딩"/>
+                <a:latin typeface="D2Coding"/>
+                <a:ea typeface="D2Coding"/>
+                <a:cs typeface="D2Coding"/>
               </a:rPr>
               <a:t>5</a:t>
             </a:r>
@@ -30462,9 +30462,9 @@
                 <a:solidFill>
                   <a:srgbClr val="7A869C"/>
                 </a:solidFill>
-                <a:latin typeface="나눔고딕코딩"/>
-                <a:ea typeface="나눔고딕코딩"/>
-                <a:cs typeface="나눔고딕코딩"/>
+                <a:latin typeface="D2Coding"/>
+                <a:ea typeface="D2Coding"/>
+                <a:cs typeface="D2Coding"/>
               </a:rPr>
               <a:t>6</a:t>
             </a:r>
@@ -30480,9 +30480,9 @@
                 <a:solidFill>
                   <a:srgbClr val="7A869C"/>
                 </a:solidFill>
-                <a:latin typeface="나눔고딕코딩"/>
-                <a:ea typeface="나눔고딕코딩"/>
-                <a:cs typeface="나눔고딕코딩"/>
+                <a:latin typeface="D2Coding"/>
+                <a:ea typeface="D2Coding"/>
+                <a:cs typeface="D2Coding"/>
               </a:rPr>
               <a:t>7</a:t>
             </a:r>
@@ -30498,9 +30498,9 @@
                 <a:solidFill>
                   <a:srgbClr val="7A869C"/>
                 </a:solidFill>
-                <a:latin typeface="나눔고딕코딩"/>
-                <a:ea typeface="나눔고딕코딩"/>
-                <a:cs typeface="나눔고딕코딩"/>
+                <a:latin typeface="D2Coding"/>
+                <a:ea typeface="D2Coding"/>
+                <a:cs typeface="D2Coding"/>
               </a:rPr>
               <a:t>8</a:t>
             </a:r>
@@ -30539,9 +30539,9 @@
                 <a:solidFill>
                   <a:srgbClr val="E6EAF2"/>
                 </a:solidFill>
-                <a:latin typeface="나눔고딕코딩"/>
-                <a:ea typeface="나눔고딕코딩"/>
-                <a:cs typeface="나눔고딕코딩"/>
+                <a:latin typeface="D2Coding"/>
+                <a:ea typeface="D2Coding"/>
+                <a:cs typeface="D2Coding"/>
               </a:rPr>
               <a:t>CREATE VIEW v_customer_basic AS</a:t>
             </a:r>
@@ -30557,9 +30557,9 @@
                 <a:solidFill>
                   <a:srgbClr val="E6EAF2"/>
                 </a:solidFill>
-                <a:latin typeface="나눔고딕코딩"/>
-                <a:ea typeface="나눔고딕코딩"/>
-                <a:cs typeface="나눔고딕코딩"/>
+                <a:latin typeface="D2Coding"/>
+                <a:ea typeface="D2Coding"/>
+                <a:cs typeface="D2Coding"/>
               </a:rPr>
               <a:t>SELECT cust_id, name, grade, city</a:t>
             </a:r>
@@ -30575,9 +30575,9 @@
                 <a:solidFill>
                   <a:srgbClr val="E6EAF2"/>
                 </a:solidFill>
-                <a:latin typeface="나눔고딕코딩"/>
-                <a:ea typeface="나눔고딕코딩"/>
-                <a:cs typeface="나눔고딕코딩"/>
+                <a:latin typeface="D2Coding"/>
+                <a:ea typeface="D2Coding"/>
+                <a:cs typeface="D2Coding"/>
               </a:rPr>
               <a:t>FROM   customers;</a:t>
             </a:r>
@@ -30593,9 +30593,9 @@
                 <a:solidFill>
                   <a:srgbClr val="E6EAF2"/>
                 </a:solidFill>
-                <a:latin typeface="나눔고딕코딩"/>
-                <a:ea typeface="나눔고딕코딩"/>
-                <a:cs typeface="나눔고딕코딩"/>
+                <a:latin typeface="D2Coding"/>
+                <a:ea typeface="D2Coding"/>
+                <a:cs typeface="D2Coding"/>
               </a:rPr>
               <a:t/>
             </a:r>
@@ -30611,9 +30611,9 @@
                 <a:solidFill>
                   <a:srgbClr val="E6EAF2"/>
                 </a:solidFill>
-                <a:latin typeface="나눔고딕코딩"/>
-                <a:ea typeface="나눔고딕코딩"/>
-                <a:cs typeface="나눔고딕코딩"/>
+                <a:latin typeface="D2Coding"/>
+                <a:ea typeface="D2Coding"/>
+                <a:cs typeface="D2Coding"/>
               </a:rPr>
               <a:t>GRANT SELECT ON daon.v_customer_basic TO 'parttime'@'localhost';</a:t>
             </a:r>
@@ -30629,9 +30629,9 @@
                 <a:solidFill>
                   <a:srgbClr val="E6EAF2"/>
                 </a:solidFill>
-                <a:latin typeface="나눔고딕코딩"/>
-                <a:ea typeface="나눔고딕코딩"/>
-                <a:cs typeface="나눔고딕코딩"/>
+                <a:latin typeface="D2Coding"/>
+                <a:ea typeface="D2Coding"/>
+                <a:cs typeface="D2Coding"/>
               </a:rPr>
               <a:t/>
             </a:r>
@@ -30647,9 +30647,9 @@
                 <a:solidFill>
                   <a:srgbClr val="E6EAF2"/>
                 </a:solidFill>
-                <a:latin typeface="나눔고딕코딩"/>
-                <a:ea typeface="나눔고딕코딩"/>
-                <a:cs typeface="나눔고딕코딩"/>
+                <a:latin typeface="D2Coding"/>
+                <a:ea typeface="D2Coding"/>
+                <a:cs typeface="D2Coding"/>
               </a:rPr>
               <a:t>SELECT * FROM v_customer_basic;</a:t>
             </a:r>
@@ -30665,9 +30665,9 @@
                 <a:solidFill>
                   <a:srgbClr val="E6EAF2"/>
                 </a:solidFill>
-                <a:latin typeface="나눔고딕코딩"/>
-                <a:ea typeface="나눔고딕코딩"/>
-                <a:cs typeface="나눔고딕코딩"/>
+                <a:latin typeface="D2Coding"/>
+                <a:ea typeface="D2Coding"/>
+                <a:cs typeface="D2Coding"/>
               </a:rPr>
               <a:t>SELECT * FROM customers;</a:t>
             </a:r>
@@ -32735,9 +32735,9 @@
                 <a:solidFill>
                   <a:srgbClr val="7A869C"/>
                 </a:solidFill>
-                <a:latin typeface="나눔고딕코딩"/>
-                <a:ea typeface="나눔고딕코딩"/>
-                <a:cs typeface="나눔고딕코딩"/>
+                <a:latin typeface="D2Coding"/>
+                <a:ea typeface="D2Coding"/>
+                <a:cs typeface="D2Coding"/>
               </a:rPr>
               <a:t>1</a:t>
             </a:r>
@@ -32753,9 +32753,9 @@
                 <a:solidFill>
                   <a:srgbClr val="7A869C"/>
                 </a:solidFill>
-                <a:latin typeface="나눔고딕코딩"/>
-                <a:ea typeface="나눔고딕코딩"/>
-                <a:cs typeface="나눔고딕코딩"/>
+                <a:latin typeface="D2Coding"/>
+                <a:ea typeface="D2Coding"/>
+                <a:cs typeface="D2Coding"/>
               </a:rPr>
               <a:t>2</a:t>
             </a:r>
@@ -32771,9 +32771,9 @@
                 <a:solidFill>
                   <a:srgbClr val="7A869C"/>
                 </a:solidFill>
-                <a:latin typeface="나눔고딕코딩"/>
-                <a:ea typeface="나눔고딕코딩"/>
-                <a:cs typeface="나눔고딕코딩"/>
+                <a:latin typeface="D2Coding"/>
+                <a:ea typeface="D2Coding"/>
+                <a:cs typeface="D2Coding"/>
               </a:rPr>
               <a:t>3</a:t>
             </a:r>
@@ -32789,9 +32789,9 @@
                 <a:solidFill>
                   <a:srgbClr val="7A869C"/>
                 </a:solidFill>
-                <a:latin typeface="나눔고딕코딩"/>
-                <a:ea typeface="나눔고딕코딩"/>
-                <a:cs typeface="나눔고딕코딩"/>
+                <a:latin typeface="D2Coding"/>
+                <a:ea typeface="D2Coding"/>
+                <a:cs typeface="D2Coding"/>
               </a:rPr>
               <a:t>4</a:t>
             </a:r>
@@ -32807,9 +32807,9 @@
                 <a:solidFill>
                   <a:srgbClr val="7A869C"/>
                 </a:solidFill>
-                <a:latin typeface="나눔고딕코딩"/>
-                <a:ea typeface="나눔고딕코딩"/>
-                <a:cs typeface="나눔고딕코딩"/>
+                <a:latin typeface="D2Coding"/>
+                <a:ea typeface="D2Coding"/>
+                <a:cs typeface="D2Coding"/>
               </a:rPr>
               <a:t>5</a:t>
             </a:r>
@@ -32825,9 +32825,9 @@
                 <a:solidFill>
                   <a:srgbClr val="7A869C"/>
                 </a:solidFill>
-                <a:latin typeface="나눔고딕코딩"/>
-                <a:ea typeface="나눔고딕코딩"/>
-                <a:cs typeface="나눔고딕코딩"/>
+                <a:latin typeface="D2Coding"/>
+                <a:ea typeface="D2Coding"/>
+                <a:cs typeface="D2Coding"/>
               </a:rPr>
               <a:t>6</a:t>
             </a:r>
@@ -32843,9 +32843,9 @@
                 <a:solidFill>
                   <a:srgbClr val="7A869C"/>
                 </a:solidFill>
-                <a:latin typeface="나눔고딕코딩"/>
-                <a:ea typeface="나눔고딕코딩"/>
-                <a:cs typeface="나눔고딕코딩"/>
+                <a:latin typeface="D2Coding"/>
+                <a:ea typeface="D2Coding"/>
+                <a:cs typeface="D2Coding"/>
               </a:rPr>
               <a:t>7</a:t>
             </a:r>
@@ -32861,9 +32861,9 @@
                 <a:solidFill>
                   <a:srgbClr val="7A869C"/>
                 </a:solidFill>
-                <a:latin typeface="나눔고딕코딩"/>
-                <a:ea typeface="나눔고딕코딩"/>
-                <a:cs typeface="나눔고딕코딩"/>
+                <a:latin typeface="D2Coding"/>
+                <a:ea typeface="D2Coding"/>
+                <a:cs typeface="D2Coding"/>
               </a:rPr>
               <a:t>8</a:t>
             </a:r>
@@ -32879,9 +32879,9 @@
                 <a:solidFill>
                   <a:srgbClr val="7A869C"/>
                 </a:solidFill>
-                <a:latin typeface="나눔고딕코딩"/>
-                <a:ea typeface="나눔고딕코딩"/>
-                <a:cs typeface="나눔고딕코딩"/>
+                <a:latin typeface="D2Coding"/>
+                <a:ea typeface="D2Coding"/>
+                <a:cs typeface="D2Coding"/>
               </a:rPr>
               <a:t>9</a:t>
             </a:r>
@@ -32897,9 +32897,9 @@
                 <a:solidFill>
                   <a:srgbClr val="7A869C"/>
                 </a:solidFill>
-                <a:latin typeface="나눔고딕코딩"/>
-                <a:ea typeface="나눔고딕코딩"/>
-                <a:cs typeface="나눔고딕코딩"/>
+                <a:latin typeface="D2Coding"/>
+                <a:ea typeface="D2Coding"/>
+                <a:cs typeface="D2Coding"/>
               </a:rPr>
               <a:t>10</a:t>
             </a:r>
@@ -32915,9 +32915,9 @@
                 <a:solidFill>
                   <a:srgbClr val="7A869C"/>
                 </a:solidFill>
-                <a:latin typeface="나눔고딕코딩"/>
-                <a:ea typeface="나눔고딕코딩"/>
-                <a:cs typeface="나눔고딕코딩"/>
+                <a:latin typeface="D2Coding"/>
+                <a:ea typeface="D2Coding"/>
+                <a:cs typeface="D2Coding"/>
               </a:rPr>
               <a:t>11</a:t>
             </a:r>
@@ -32933,9 +32933,9 @@
                 <a:solidFill>
                   <a:srgbClr val="7A869C"/>
                 </a:solidFill>
-                <a:latin typeface="나눔고딕코딩"/>
-                <a:ea typeface="나눔고딕코딩"/>
-                <a:cs typeface="나눔고딕코딩"/>
+                <a:latin typeface="D2Coding"/>
+                <a:ea typeface="D2Coding"/>
+                <a:cs typeface="D2Coding"/>
               </a:rPr>
               <a:t>12</a:t>
             </a:r>
@@ -32974,9 +32974,9 @@
                 <a:solidFill>
                   <a:srgbClr val="E6EAF2"/>
                 </a:solidFill>
-                <a:latin typeface="나눔고딕코딩"/>
-                <a:ea typeface="나눔고딕코딩"/>
-                <a:cs typeface="나눔고딕코딩"/>
+                <a:latin typeface="D2Coding"/>
+                <a:ea typeface="D2Coding"/>
+                <a:cs typeface="D2Coding"/>
               </a:rPr>
               <a:t>CREATE ROLE 'role_read', 'role_write';</a:t>
             </a:r>
@@ -32992,9 +32992,9 @@
                 <a:solidFill>
                   <a:srgbClr val="E6EAF2"/>
                 </a:solidFill>
-                <a:latin typeface="나눔고딕코딩"/>
-                <a:ea typeface="나눔고딕코딩"/>
-                <a:cs typeface="나눔고딕코딩"/>
+                <a:latin typeface="D2Coding"/>
+                <a:ea typeface="D2Coding"/>
+                <a:cs typeface="D2Coding"/>
               </a:rPr>
               <a:t/>
             </a:r>
@@ -33010,9 +33010,9 @@
                 <a:solidFill>
                   <a:srgbClr val="E6EAF2"/>
                 </a:solidFill>
-                <a:latin typeface="나눔고딕코딩"/>
-                <a:ea typeface="나눔고딕코딩"/>
-                <a:cs typeface="나눔고딕코딩"/>
+                <a:latin typeface="D2Coding"/>
+                <a:ea typeface="D2Coding"/>
+                <a:cs typeface="D2Coding"/>
               </a:rPr>
               <a:t>GRANT SELECT ON daon.* TO 'role_read';</a:t>
             </a:r>
@@ -33028,9 +33028,9 @@
                 <a:solidFill>
                   <a:srgbClr val="E6EAF2"/>
                 </a:solidFill>
-                <a:latin typeface="나눔고딕코딩"/>
-                <a:ea typeface="나눔고딕코딩"/>
-                <a:cs typeface="나눔고딕코딩"/>
+                <a:latin typeface="D2Coding"/>
+                <a:ea typeface="D2Coding"/>
+                <a:cs typeface="D2Coding"/>
               </a:rPr>
               <a:t>GRANT INSERT, UPDATE, DELETE ON daon.* TO 'role_write';</a:t>
             </a:r>
@@ -33046,9 +33046,9 @@
                 <a:solidFill>
                   <a:srgbClr val="E6EAF2"/>
                 </a:solidFill>
-                <a:latin typeface="나눔고딕코딩"/>
-                <a:ea typeface="나눔고딕코딩"/>
-                <a:cs typeface="나눔고딕코딩"/>
+                <a:latin typeface="D2Coding"/>
+                <a:ea typeface="D2Coding"/>
+                <a:cs typeface="D2Coding"/>
               </a:rPr>
               <a:t/>
             </a:r>
@@ -33064,9 +33064,9 @@
                 <a:solidFill>
                   <a:srgbClr val="E6EAF2"/>
                 </a:solidFill>
-                <a:latin typeface="나눔고딕코딩"/>
-                <a:ea typeface="나눔고딕코딩"/>
-                <a:cs typeface="나눔고딕코딩"/>
+                <a:latin typeface="D2Coding"/>
+                <a:ea typeface="D2Coding"/>
+                <a:cs typeface="D2Coding"/>
               </a:rPr>
               <a:t>GRANT 'role_read' TO 'parttime'@'localhost';</a:t>
             </a:r>
@@ -33082,9 +33082,9 @@
                 <a:solidFill>
                   <a:srgbClr val="E6EAF2"/>
                 </a:solidFill>
-                <a:latin typeface="나눔고딕코딩"/>
-                <a:ea typeface="나눔고딕코딩"/>
-                <a:cs typeface="나눔고딕코딩"/>
+                <a:latin typeface="D2Coding"/>
+                <a:ea typeface="D2Coding"/>
+                <a:cs typeface="D2Coding"/>
               </a:rPr>
               <a:t>GRANT 'role_read', 'role_write' TO 'manager'@'localhost';</a:t>
             </a:r>
@@ -33100,9 +33100,9 @@
                 <a:solidFill>
                   <a:srgbClr val="E6EAF2"/>
                 </a:solidFill>
-                <a:latin typeface="나눔고딕코딩"/>
-                <a:ea typeface="나눔고딕코딩"/>
-                <a:cs typeface="나눔고딕코딩"/>
+                <a:latin typeface="D2Coding"/>
+                <a:ea typeface="D2Coding"/>
+                <a:cs typeface="D2Coding"/>
               </a:rPr>
               <a:t/>
             </a:r>
@@ -33118,9 +33118,9 @@
                 <a:solidFill>
                   <a:srgbClr val="E6EAF2"/>
                 </a:solidFill>
-                <a:latin typeface="나눔고딕코딩"/>
-                <a:ea typeface="나눔고딕코딩"/>
-                <a:cs typeface="나눔고딕코딩"/>
+                <a:latin typeface="D2Coding"/>
+                <a:ea typeface="D2Coding"/>
+                <a:cs typeface="D2Coding"/>
               </a:rPr>
               <a:t>SET DEFAULT ROLE ALL TO 'manager'@'localhost';</a:t>
             </a:r>
@@ -33136,9 +33136,9 @@
                 <a:solidFill>
                   <a:srgbClr val="E6EAF2"/>
                 </a:solidFill>
-                <a:latin typeface="나눔고딕코딩"/>
-                <a:ea typeface="나눔고딕코딩"/>
-                <a:cs typeface="나눔고딕코딩"/>
+                <a:latin typeface="D2Coding"/>
+                <a:ea typeface="D2Coding"/>
+                <a:cs typeface="D2Coding"/>
               </a:rPr>
               <a:t/>
             </a:r>
@@ -33154,9 +33154,9 @@
                 <a:solidFill>
                   <a:srgbClr val="E6EAF2"/>
                 </a:solidFill>
-                <a:latin typeface="나눔고딕코딩"/>
-                <a:ea typeface="나눔고딕코딩"/>
-                <a:cs typeface="나눔고딕코딩"/>
+                <a:latin typeface="D2Coding"/>
+                <a:ea typeface="D2Coding"/>
+                <a:cs typeface="D2Coding"/>
               </a:rPr>
               <a:t>REVOKE 'role_write' FROM 'manager'@'localhost';</a:t>
             </a:r>
@@ -33172,9 +33172,9 @@
                 <a:solidFill>
                   <a:srgbClr val="E6EAF2"/>
                 </a:solidFill>
-                <a:latin typeface="나눔고딕코딩"/>
-                <a:ea typeface="나눔고딕코딩"/>
-                <a:cs typeface="나눔고딕코딩"/>
+                <a:latin typeface="D2Coding"/>
+                <a:ea typeface="D2Coding"/>
+                <a:cs typeface="D2Coding"/>
               </a:rPr>
               <a:t>DROP ROLE 'role_write';</a:t>
             </a:r>
@@ -44232,9 +44232,9 @@
                 <a:solidFill>
                   <a:srgbClr val="7A869C"/>
                 </a:solidFill>
-                <a:latin typeface="나눔고딕코딩"/>
-                <a:ea typeface="나눔고딕코딩"/>
-                <a:cs typeface="나눔고딕코딩"/>
+                <a:latin typeface="D2Coding"/>
+                <a:ea typeface="D2Coding"/>
+                <a:cs typeface="D2Coding"/>
               </a:rPr>
               <a:t>1</a:t>
             </a:r>
@@ -44250,9 +44250,9 @@
                 <a:solidFill>
                   <a:srgbClr val="7A869C"/>
                 </a:solidFill>
-                <a:latin typeface="나눔고딕코딩"/>
-                <a:ea typeface="나눔고딕코딩"/>
-                <a:cs typeface="나눔고딕코딩"/>
+                <a:latin typeface="D2Coding"/>
+                <a:ea typeface="D2Coding"/>
+                <a:cs typeface="D2Coding"/>
               </a:rPr>
               <a:t>2</a:t>
             </a:r>
@@ -44268,9 +44268,9 @@
                 <a:solidFill>
                   <a:srgbClr val="7A869C"/>
                 </a:solidFill>
-                <a:latin typeface="나눔고딕코딩"/>
-                <a:ea typeface="나눔고딕코딩"/>
-                <a:cs typeface="나눔고딕코딩"/>
+                <a:latin typeface="D2Coding"/>
+                <a:ea typeface="D2Coding"/>
+                <a:cs typeface="D2Coding"/>
               </a:rPr>
               <a:t>3</a:t>
             </a:r>
@@ -44286,9 +44286,9 @@
                 <a:solidFill>
                   <a:srgbClr val="7A869C"/>
                 </a:solidFill>
-                <a:latin typeface="나눔고딕코딩"/>
-                <a:ea typeface="나눔고딕코딩"/>
-                <a:cs typeface="나눔고딕코딩"/>
+                <a:latin typeface="D2Coding"/>
+                <a:ea typeface="D2Coding"/>
+                <a:cs typeface="D2Coding"/>
               </a:rPr>
               <a:t>4</a:t>
             </a:r>
@@ -44304,9 +44304,9 @@
                 <a:solidFill>
                   <a:srgbClr val="7A869C"/>
                 </a:solidFill>
-                <a:latin typeface="나눔고딕코딩"/>
-                <a:ea typeface="나눔고딕코딩"/>
-                <a:cs typeface="나눔고딕코딩"/>
+                <a:latin typeface="D2Coding"/>
+                <a:ea typeface="D2Coding"/>
+                <a:cs typeface="D2Coding"/>
               </a:rPr>
               <a:t>5</a:t>
             </a:r>
@@ -44322,9 +44322,9 @@
                 <a:solidFill>
                   <a:srgbClr val="7A869C"/>
                 </a:solidFill>
-                <a:latin typeface="나눔고딕코딩"/>
-                <a:ea typeface="나눔고딕코딩"/>
-                <a:cs typeface="나눔고딕코딩"/>
+                <a:latin typeface="D2Coding"/>
+                <a:ea typeface="D2Coding"/>
+                <a:cs typeface="D2Coding"/>
               </a:rPr>
               <a:t>6</a:t>
             </a:r>
@@ -44340,9 +44340,9 @@
                 <a:solidFill>
                   <a:srgbClr val="7A869C"/>
                 </a:solidFill>
-                <a:latin typeface="나눔고딕코딩"/>
-                <a:ea typeface="나눔고딕코딩"/>
-                <a:cs typeface="나눔고딕코딩"/>
+                <a:latin typeface="D2Coding"/>
+                <a:ea typeface="D2Coding"/>
+                <a:cs typeface="D2Coding"/>
               </a:rPr>
               <a:t>7</a:t>
             </a:r>
@@ -44358,9 +44358,9 @@
                 <a:solidFill>
                   <a:srgbClr val="7A869C"/>
                 </a:solidFill>
-                <a:latin typeface="나눔고딕코딩"/>
-                <a:ea typeface="나눔고딕코딩"/>
-                <a:cs typeface="나눔고딕코딩"/>
+                <a:latin typeface="D2Coding"/>
+                <a:ea typeface="D2Coding"/>
+                <a:cs typeface="D2Coding"/>
               </a:rPr>
               <a:t>8</a:t>
             </a:r>
@@ -44376,9 +44376,9 @@
                 <a:solidFill>
                   <a:srgbClr val="7A869C"/>
                 </a:solidFill>
-                <a:latin typeface="나눔고딕코딩"/>
-                <a:ea typeface="나눔고딕코딩"/>
-                <a:cs typeface="나눔고딕코딩"/>
+                <a:latin typeface="D2Coding"/>
+                <a:ea typeface="D2Coding"/>
+                <a:cs typeface="D2Coding"/>
               </a:rPr>
               <a:t>9</a:t>
             </a:r>
@@ -44417,9 +44417,9 @@
                 <a:solidFill>
                   <a:srgbClr val="E6EAF2"/>
                 </a:solidFill>
-                <a:latin typeface="나눔고딕코딩"/>
-                <a:ea typeface="나눔고딕코딩"/>
-                <a:cs typeface="나눔고딕코딩"/>
+                <a:latin typeface="D2Coding"/>
+                <a:ea typeface="D2Coding"/>
+                <a:cs typeface="D2Coding"/>
               </a:rPr>
               <a:t>CREATE VIEW v_monthly_sales AS</a:t>
             </a:r>
@@ -44435,9 +44435,9 @@
                 <a:solidFill>
                   <a:srgbClr val="E6EAF2"/>
                 </a:solidFill>
-                <a:latin typeface="나눔고딕코딩"/>
-                <a:ea typeface="나눔고딕코딩"/>
-                <a:cs typeface="나눔고딕코딩"/>
+                <a:latin typeface="D2Coding"/>
+                <a:ea typeface="D2Coding"/>
+                <a:cs typeface="D2Coding"/>
               </a:rPr>
               <a:t>SELECT DATE_FORMAT(o.order_date, '%Y-%m') AS 월,</a:t>
             </a:r>
@@ -44453,9 +44453,9 @@
                 <a:solidFill>
                   <a:srgbClr val="E6EAF2"/>
                 </a:solidFill>
-                <a:latin typeface="나눔고딕코딩"/>
-                <a:ea typeface="나눔고딕코딩"/>
-                <a:cs typeface="나눔고딕코딩"/>
+                <a:latin typeface="D2Coding"/>
+                <a:ea typeface="D2Coding"/>
+                <a:cs typeface="D2Coding"/>
               </a:rPr>
               <a:t>       SUM(i.qty * i.unit_price)           AS 매출액</a:t>
             </a:r>
@@ -44471,9 +44471,9 @@
                 <a:solidFill>
                   <a:srgbClr val="E6EAF2"/>
                 </a:solidFill>
-                <a:latin typeface="나눔고딕코딩"/>
-                <a:ea typeface="나눔고딕코딩"/>
-                <a:cs typeface="나눔고딕코딩"/>
+                <a:latin typeface="D2Coding"/>
+                <a:ea typeface="D2Coding"/>
+                <a:cs typeface="D2Coding"/>
               </a:rPr>
               <a:t>FROM   orders o</a:t>
             </a:r>
@@ -44489,9 +44489,9 @@
                 <a:solidFill>
                   <a:srgbClr val="E6EAF2"/>
                 </a:solidFill>
-                <a:latin typeface="나눔고딕코딩"/>
-                <a:ea typeface="나눔고딕코딩"/>
-                <a:cs typeface="나눔고딕코딩"/>
+                <a:latin typeface="D2Coding"/>
+                <a:ea typeface="D2Coding"/>
+                <a:cs typeface="D2Coding"/>
               </a:rPr>
               <a:t>JOIN   order_items i ON o.order_id = i.order_id</a:t>
             </a:r>
@@ -44507,9 +44507,9 @@
                 <a:solidFill>
                   <a:srgbClr val="E6EAF2"/>
                 </a:solidFill>
-                <a:latin typeface="나눔고딕코딩"/>
-                <a:ea typeface="나눔고딕코딩"/>
-                <a:cs typeface="나눔고딕코딩"/>
+                <a:latin typeface="D2Coding"/>
+                <a:ea typeface="D2Coding"/>
+                <a:cs typeface="D2Coding"/>
               </a:rPr>
               <a:t>WHERE  o.status &lt;&gt; '취소'</a:t>
             </a:r>
@@ -44525,9 +44525,9 @@
                 <a:solidFill>
                   <a:srgbClr val="E6EAF2"/>
                 </a:solidFill>
-                <a:latin typeface="나눔고딕코딩"/>
-                <a:ea typeface="나눔고딕코딩"/>
-                <a:cs typeface="나눔고딕코딩"/>
+                <a:latin typeface="D2Coding"/>
+                <a:ea typeface="D2Coding"/>
+                <a:cs typeface="D2Coding"/>
               </a:rPr>
               <a:t>GROUP  BY DATE_FORMAT(o.order_date, '%Y-%m');</a:t>
             </a:r>
@@ -44543,9 +44543,9 @@
                 <a:solidFill>
                   <a:srgbClr val="E6EAF2"/>
                 </a:solidFill>
-                <a:latin typeface="나눔고딕코딩"/>
-                <a:ea typeface="나눔고딕코딩"/>
-                <a:cs typeface="나눔고딕코딩"/>
+                <a:latin typeface="D2Coding"/>
+                <a:ea typeface="D2Coding"/>
+                <a:cs typeface="D2Coding"/>
               </a:rPr>
               <a:t/>
             </a:r>
@@ -44561,9 +44561,9 @@
                 <a:solidFill>
                   <a:srgbClr val="E6EAF2"/>
                 </a:solidFill>
-                <a:latin typeface="나눔고딕코딩"/>
-                <a:ea typeface="나눔고딕코딩"/>
-                <a:cs typeface="나눔고딕코딩"/>
+                <a:latin typeface="D2Coding"/>
+                <a:ea typeface="D2Coding"/>
+                <a:cs typeface="D2Coding"/>
               </a:rPr>
               <a:t>SELECT * FROM v_monthly_sales ORDER BY 월;</a:t>
             </a:r>
@@ -46529,9 +46529,9 @@
                 <a:solidFill>
                   <a:srgbClr val="E6EAF2"/>
                 </a:solidFill>
-                <a:latin typeface="나눔고딕코딩"/>
-                <a:ea typeface="나눔고딕코딩"/>
-                <a:cs typeface="나눔고딕코딩"/>
+                <a:latin typeface="D2Coding"/>
+                <a:ea typeface="D2Coding"/>
+                <a:cs typeface="D2Coding"/>
               </a:rPr>
               <a:t>CREATE OR REPLACE VIEW v_monthly_sales AS SELECT ...;</a:t>
             </a:r>
@@ -46748,9 +46748,9 @@
                 <a:solidFill>
                   <a:srgbClr val="E6EAF2"/>
                 </a:solidFill>
-                <a:latin typeface="나눔고딕코딩"/>
-                <a:ea typeface="나눔고딕코딩"/>
-                <a:cs typeface="나눔고딕코딩"/>
+                <a:latin typeface="D2Coding"/>
+                <a:ea typeface="D2Coding"/>
+                <a:cs typeface="D2Coding"/>
               </a:rPr>
               <a:t>DROP VIEW IF EXISTS v_monthly_sales;</a:t>
             </a:r>
@@ -46967,9 +46967,9 @@
                 <a:solidFill>
                   <a:srgbClr val="E6EAF2"/>
                 </a:solidFill>
-                <a:latin typeface="나눔고딕코딩"/>
-                <a:ea typeface="나눔고딕코딩"/>
-                <a:cs typeface="나눔고딕코딩"/>
+                <a:latin typeface="D2Coding"/>
+                <a:ea typeface="D2Coding"/>
+                <a:cs typeface="D2Coding"/>
               </a:rPr>
               <a:t>SHOW FULL TABLES WHERE table_type = 'VIEW';</a:t>
             </a:r>
@@ -47186,9 +47186,9 @@
                 <a:solidFill>
                   <a:srgbClr val="E6EAF2"/>
                 </a:solidFill>
-                <a:latin typeface="나눔고딕코딩"/>
-                <a:ea typeface="나눔고딕코딩"/>
-                <a:cs typeface="나눔고딕코딩"/>
+                <a:latin typeface="D2Coding"/>
+                <a:ea typeface="D2Coding"/>
+                <a:cs typeface="D2Coding"/>
               </a:rPr>
               <a:t>SHOW CREATE VIEW v_monthly_sales;</a:t>
             </a:r>
@@ -47913,9 +47913,9 @@
                 <a:solidFill>
                   <a:srgbClr val="7A869C"/>
                 </a:solidFill>
-                <a:latin typeface="나눔고딕코딩"/>
-                <a:ea typeface="나눔고딕코딩"/>
-                <a:cs typeface="나눔고딕코딩"/>
+                <a:latin typeface="D2Coding"/>
+                <a:ea typeface="D2Coding"/>
+                <a:cs typeface="D2Coding"/>
               </a:rPr>
               <a:t>1</a:t>
             </a:r>
@@ -47931,9 +47931,9 @@
                 <a:solidFill>
                   <a:srgbClr val="7A869C"/>
                 </a:solidFill>
-                <a:latin typeface="나눔고딕코딩"/>
-                <a:ea typeface="나눔고딕코딩"/>
-                <a:cs typeface="나눔고딕코딩"/>
+                <a:latin typeface="D2Coding"/>
+                <a:ea typeface="D2Coding"/>
+                <a:cs typeface="D2Coding"/>
               </a:rPr>
               <a:t>2</a:t>
             </a:r>
@@ -47949,9 +47949,9 @@
                 <a:solidFill>
                   <a:srgbClr val="7A869C"/>
                 </a:solidFill>
-                <a:latin typeface="나눔고딕코딩"/>
-                <a:ea typeface="나눔고딕코딩"/>
-                <a:cs typeface="나눔고딕코딩"/>
+                <a:latin typeface="D2Coding"/>
+                <a:ea typeface="D2Coding"/>
+                <a:cs typeface="D2Coding"/>
               </a:rPr>
               <a:t>3</a:t>
             </a:r>
@@ -47967,9 +47967,9 @@
                 <a:solidFill>
                   <a:srgbClr val="7A869C"/>
                 </a:solidFill>
-                <a:latin typeface="나눔고딕코딩"/>
-                <a:ea typeface="나눔고딕코딩"/>
-                <a:cs typeface="나눔고딕코딩"/>
+                <a:latin typeface="D2Coding"/>
+                <a:ea typeface="D2Coding"/>
+                <a:cs typeface="D2Coding"/>
               </a:rPr>
               <a:t>4</a:t>
             </a:r>
@@ -47985,9 +47985,9 @@
                 <a:solidFill>
                   <a:srgbClr val="7A869C"/>
                 </a:solidFill>
-                <a:latin typeface="나눔고딕코딩"/>
-                <a:ea typeface="나눔고딕코딩"/>
-                <a:cs typeface="나눔고딕코딩"/>
+                <a:latin typeface="D2Coding"/>
+                <a:ea typeface="D2Coding"/>
+                <a:cs typeface="D2Coding"/>
               </a:rPr>
               <a:t>5</a:t>
             </a:r>
@@ -48003,9 +48003,9 @@
                 <a:solidFill>
                   <a:srgbClr val="7A869C"/>
                 </a:solidFill>
-                <a:latin typeface="나눔고딕코딩"/>
-                <a:ea typeface="나눔고딕코딩"/>
-                <a:cs typeface="나눔고딕코딩"/>
+                <a:latin typeface="D2Coding"/>
+                <a:ea typeface="D2Coding"/>
+                <a:cs typeface="D2Coding"/>
               </a:rPr>
               <a:t>6</a:t>
             </a:r>
@@ -48044,9 +48044,9 @@
                 <a:solidFill>
                   <a:srgbClr val="E6EAF2"/>
                 </a:solidFill>
-                <a:latin typeface="나눔고딕코딩"/>
-                <a:ea typeface="나눔고딕코딩"/>
-                <a:cs typeface="나눔고딕코딩"/>
+                <a:latin typeface="D2Coding"/>
+                <a:ea typeface="D2Coding"/>
+                <a:cs typeface="D2Coding"/>
               </a:rPr>
               <a:t>CREATE VIEW v_vip_customers AS</a:t>
             </a:r>
@@ -48062,9 +48062,9 @@
                 <a:solidFill>
                   <a:srgbClr val="E6EAF2"/>
                 </a:solidFill>
-                <a:latin typeface="나눔고딕코딩"/>
-                <a:ea typeface="나눔고딕코딩"/>
-                <a:cs typeface="나눔고딕코딩"/>
+                <a:latin typeface="D2Coding"/>
+                <a:ea typeface="D2Coding"/>
+                <a:cs typeface="D2Coding"/>
               </a:rPr>
               <a:t>SELECT cust_id, name, city, points</a:t>
             </a:r>
@@ -48080,9 +48080,9 @@
                 <a:solidFill>
                   <a:srgbClr val="E6EAF2"/>
                 </a:solidFill>
-                <a:latin typeface="나눔고딕코딩"/>
-                <a:ea typeface="나눔고딕코딩"/>
-                <a:cs typeface="나눔고딕코딩"/>
+                <a:latin typeface="D2Coding"/>
+                <a:ea typeface="D2Coding"/>
+                <a:cs typeface="D2Coding"/>
               </a:rPr>
               <a:t>FROM   customers</a:t>
             </a:r>
@@ -48098,9 +48098,9 @@
                 <a:solidFill>
                   <a:srgbClr val="E6EAF2"/>
                 </a:solidFill>
-                <a:latin typeface="나눔고딕코딩"/>
-                <a:ea typeface="나눔고딕코딩"/>
-                <a:cs typeface="나눔고딕코딩"/>
+                <a:latin typeface="D2Coding"/>
+                <a:ea typeface="D2Coding"/>
+                <a:cs typeface="D2Coding"/>
               </a:rPr>
               <a:t>WHERE  grade = 'VIP';</a:t>
             </a:r>
@@ -48116,9 +48116,9 @@
                 <a:solidFill>
                   <a:srgbClr val="E6EAF2"/>
                 </a:solidFill>
-                <a:latin typeface="나눔고딕코딩"/>
-                <a:ea typeface="나눔고딕코딩"/>
-                <a:cs typeface="나눔고딕코딩"/>
+                <a:latin typeface="D2Coding"/>
+                <a:ea typeface="D2Coding"/>
+                <a:cs typeface="D2Coding"/>
               </a:rPr>
               <a:t/>
             </a:r>
@@ -48134,9 +48134,9 @@
                 <a:solidFill>
                   <a:srgbClr val="E6EAF2"/>
                 </a:solidFill>
-                <a:latin typeface="나눔고딕코딩"/>
-                <a:ea typeface="나눔고딕코딩"/>
-                <a:cs typeface="나눔고딕코딩"/>
+                <a:latin typeface="D2Coding"/>
+                <a:ea typeface="D2Coding"/>
+                <a:cs typeface="D2Coding"/>
               </a:rPr>
               <a:t>SELECT * FROM v_vip_customers ORDER BY points DESC;</a:t>
             </a:r>
